--- a/assignment/Relative_Interest_Pie_Chart_Mixed.pptx
+++ b/assignment/Relative_Interest_Pie_Chart_Mixed.pptx
@@ -128,7 +128,7 @@
                 <a:solidFill>
                   <a:srgbClr val="000000"/>
                 </a:solidFill>
-                <a:latin typeface="Arial"/>
+                <a:latin typeface="Calibri"/>
               </a:rPr>
               <a:t>Share of Total Interest</a:t>
             </a:r>
@@ -290,7 +290,7 @@
                   <a:solidFill>
                     <a:srgbClr val="000000"/>
                   </a:solidFill>
-                  <a:latin typeface="Arial"/>
+                  <a:latin typeface="Calibri"/>
                 </a:defRPr>
               </a:pPr>
             </a:p>
@@ -317,7 +317,7 @@
           <a:solidFill>
             <a:srgbClr val="000000"/>
           </a:solidFill>
-          <a:latin typeface="Arial"/>
+          <a:latin typeface="Calibri"/>
         </a:defRPr>
       </a:pPr>
       <a:endParaRPr lang="en-US"/>
@@ -4010,11 +4010,11 @@
           <a:p>
             <a:pPr algn="ctr"/>
             <a:r>
-              <a:rPr sz="5000" b="0">
+              <a:rPr sz="4800" b="1">
                 <a:solidFill>
                   <a:srgbClr val="1F3864"/>
                 </a:solidFill>
-                <a:latin typeface="Rockwell Condensed"/>
+                <a:latin typeface="Cambria"/>
               </a:rPr>
               <a:t>RELATIVE INTEREST</a:t>
             </a:r>
@@ -4051,7 +4051,7 @@
                 <a:solidFill>
                   <a:srgbClr val="000000"/>
                 </a:solidFill>
-                <a:latin typeface="Arial"/>
+                <a:latin typeface="Calibri"/>
               </a:rPr>
               <a:t>Digital Skills Programmes on Google Trends</a:t>
             </a:r>
@@ -4067,7 +4067,7 @@
                 <a:solidFill>
                   <a:srgbClr val="000000"/>
                 </a:solidFill>
-                <a:latin typeface="Arial"/>
+                <a:latin typeface="Calibri"/>
               </a:rPr>
               <a:t>Market Research Lab, Task 1  ·  Nigeria, past 12 months</a:t>
             </a:r>
@@ -4295,13 +4295,13 @@
           <a:p>
             <a:pPr algn="ctr"/>
             <a:r>
-              <a:rPr sz="4000" b="0">
+              <a:rPr sz="3600" b="1">
                 <a:solidFill>
                   <a:srgbClr val="1F3864"/>
                 </a:solidFill>
-                <a:latin typeface="Rockwell Condensed"/>
+                <a:latin typeface="Cambria"/>
               </a:rPr>
-              <a:t>RELATIVE-INTEREST OBSERVATIONS</a:t>
+              <a:t>Relative-Interest Observations</a:t>
             </a:r>
           </a:p>
         </p:txBody>
@@ -4343,7 +4343,7 @@
                           <a:solidFill>
                             <a:srgbClr val="FFFFFF"/>
                           </a:solidFill>
-                          <a:latin typeface="Arial"/>
+                          <a:latin typeface="Calibri"/>
                         </a:rPr>
                         <a:t>Programme</a:t>
                       </a:r>
@@ -4402,7 +4402,7 @@
                           <a:solidFill>
                             <a:srgbClr val="FFFFFF"/>
                           </a:solidFill>
-                          <a:latin typeface="Arial"/>
+                          <a:latin typeface="Calibri"/>
                         </a:rPr>
                         <a:t>Average score</a:t>
                       </a:r>
@@ -4461,7 +4461,7 @@
                           <a:solidFill>
                             <a:srgbClr val="FFFFFF"/>
                           </a:solidFill>
-                          <a:latin typeface="Arial"/>
+                          <a:latin typeface="Calibri"/>
                         </a:rPr>
                         <a:t>Rank</a:t>
                       </a:r>
@@ -4522,7 +4522,7 @@
                           <a:solidFill>
                             <a:srgbClr val="000000"/>
                           </a:solidFill>
-                          <a:latin typeface="Arial"/>
+                          <a:latin typeface="Calibri"/>
                         </a:rPr>
                         <a:t>Cybersecurity</a:t>
                       </a:r>
@@ -4579,7 +4579,7 @@
                           <a:solidFill>
                             <a:srgbClr val="000000"/>
                           </a:solidFill>
-                          <a:latin typeface="Arial"/>
+                          <a:latin typeface="Calibri"/>
                         </a:rPr>
                         <a:t>43</a:t>
                       </a:r>
@@ -4636,7 +4636,7 @@
                           <a:solidFill>
                             <a:srgbClr val="000000"/>
                           </a:solidFill>
-                          <a:latin typeface="Arial"/>
+                          <a:latin typeface="Calibri"/>
                         </a:rPr>
                         <a:t>1</a:t>
                       </a:r>
@@ -4695,7 +4695,7 @@
                           <a:solidFill>
                             <a:srgbClr val="000000"/>
                           </a:solidFill>
-                          <a:latin typeface="Arial"/>
+                          <a:latin typeface="Calibri"/>
                         </a:rPr>
                         <a:t>Digital Marketing</a:t>
                       </a:r>
@@ -4754,7 +4754,7 @@
                           <a:solidFill>
                             <a:srgbClr val="000000"/>
                           </a:solidFill>
-                          <a:latin typeface="Arial"/>
+                          <a:latin typeface="Calibri"/>
                         </a:rPr>
                         <a:t>33</a:t>
                       </a:r>
@@ -4813,7 +4813,7 @@
                           <a:solidFill>
                             <a:srgbClr val="000000"/>
                           </a:solidFill>
-                          <a:latin typeface="Arial"/>
+                          <a:latin typeface="Calibri"/>
                         </a:rPr>
                         <a:t>2</a:t>
                       </a:r>
@@ -4874,7 +4874,7 @@
                           <a:solidFill>
                             <a:srgbClr val="000000"/>
                           </a:solidFill>
-                          <a:latin typeface="Arial"/>
+                          <a:latin typeface="Calibri"/>
                         </a:rPr>
                         <a:t>Data Analytics</a:t>
                       </a:r>
@@ -4931,7 +4931,7 @@
                           <a:solidFill>
                             <a:srgbClr val="000000"/>
                           </a:solidFill>
-                          <a:latin typeface="Arial"/>
+                          <a:latin typeface="Calibri"/>
                         </a:rPr>
                         <a:t>18</a:t>
                       </a:r>
@@ -4988,7 +4988,7 @@
                           <a:solidFill>
                             <a:srgbClr val="000000"/>
                           </a:solidFill>
-                          <a:latin typeface="Arial"/>
+                          <a:latin typeface="Calibri"/>
                         </a:rPr>
                         <a:t>3</a:t>
                       </a:r>
@@ -5047,7 +5047,7 @@
                           <a:solidFill>
                             <a:srgbClr val="000000"/>
                           </a:solidFill>
-                          <a:latin typeface="Arial"/>
+                          <a:latin typeface="Calibri"/>
                         </a:rPr>
                         <a:t>Generative AI &amp; Prompt Engineering</a:t>
                       </a:r>
@@ -5106,7 +5106,7 @@
                           <a:solidFill>
                             <a:srgbClr val="000000"/>
                           </a:solidFill>
-                          <a:latin typeface="Arial"/>
+                          <a:latin typeface="Calibri"/>
                         </a:rPr>
                         <a:t>13</a:t>
                       </a:r>
@@ -5165,7 +5165,7 @@
                           <a:solidFill>
                             <a:srgbClr val="000000"/>
                           </a:solidFill>
-                          <a:latin typeface="Arial"/>
+                          <a:latin typeface="Calibri"/>
                         </a:rPr>
                         <a:t>4</a:t>
                       </a:r>
@@ -5226,7 +5226,7 @@
                           <a:solidFill>
                             <a:srgbClr val="000000"/>
                           </a:solidFill>
-                          <a:latin typeface="Arial"/>
+                          <a:latin typeface="Calibri"/>
                         </a:rPr>
                         <a:t>Web Development</a:t>
                       </a:r>
@@ -5283,7 +5283,7 @@
                           <a:solidFill>
                             <a:srgbClr val="000000"/>
                           </a:solidFill>
-                          <a:latin typeface="Arial"/>
+                          <a:latin typeface="Calibri"/>
                         </a:rPr>
                         <a:t>13</a:t>
                       </a:r>
@@ -5340,7 +5340,7 @@
                           <a:solidFill>
                             <a:srgbClr val="000000"/>
                           </a:solidFill>
-                          <a:latin typeface="Arial"/>
+                          <a:latin typeface="Calibri"/>
                         </a:rPr>
                         <a:t>4</a:t>
                       </a:r>
@@ -5454,7 +5454,7 @@
                 <a:solidFill>
                   <a:srgbClr val="404040"/>
                 </a:solidFill>
-                <a:latin typeface="Arial"/>
+                <a:latin typeface="Calibri"/>
               </a:rPr>
               <a:t>The average Google Trends score of each programme</a:t>
             </a:r>
@@ -5489,7 +5489,7 @@
                 <a:solidFill>
                   <a:srgbClr val="404040"/>
                 </a:solidFill>
-                <a:latin typeface="Arial"/>
+                <a:latin typeface="Calibri"/>
               </a:rPr>
               <a:t>Google Trends gives each programme a score from 0 to 100, where 100 means the highest interest.</a:t>
             </a:r>
@@ -5582,13 +5582,13 @@
           <a:p>
             <a:pPr algn="ctr"/>
             <a:r>
-              <a:rPr sz="4000" b="0">
+              <a:rPr sz="3600" b="1">
                 <a:solidFill>
                   <a:srgbClr val="1F3864"/>
                 </a:solidFill>
-                <a:latin typeface="Rockwell Condensed"/>
+                <a:latin typeface="Cambria"/>
               </a:rPr>
-              <a:t>RELATIVE INTEREST BY PROGRAMME</a:t>
+              <a:t>Relative Interest by Programme</a:t>
             </a:r>
           </a:p>
         </p:txBody>
@@ -5676,7 +5676,7 @@
                 <a:solidFill>
                   <a:srgbClr val="404040"/>
                 </a:solidFill>
-                <a:latin typeface="Arial"/>
+                <a:latin typeface="Calibri"/>
               </a:rPr>
               <a:t>Each programme's share of the total interest</a:t>
             </a:r>
@@ -5751,22 +5751,22 @@
           <a:lstStyle/>
           <a:p>
             <a:r>
-              <a:rPr sz="1500" b="1">
+              <a:rPr sz="1600" b="1">
                 <a:solidFill>
                   <a:srgbClr val="000000"/>
                 </a:solidFill>
-                <a:latin typeface="Arial"/>
+                <a:latin typeface="Calibri"/>
               </a:rPr>
               <a:t>Cybersecurity</a:t>
             </a:r>
           </a:p>
           <a:p>
             <a:r>
-              <a:rPr sz="1400" b="0">
+              <a:rPr sz="1500" b="0">
                 <a:solidFill>
                   <a:srgbClr val="000000"/>
                 </a:solidFill>
-                <a:latin typeface="Arial"/>
+                <a:latin typeface="Calibri"/>
               </a:rPr>
               <a:t>Score 43  ·  36%</a:t>
             </a:r>
@@ -5841,22 +5841,22 @@
           <a:lstStyle/>
           <a:p>
             <a:r>
-              <a:rPr sz="1500" b="1">
+              <a:rPr sz="1600" b="1">
                 <a:solidFill>
                   <a:srgbClr val="000000"/>
                 </a:solidFill>
-                <a:latin typeface="Arial"/>
+                <a:latin typeface="Calibri"/>
               </a:rPr>
               <a:t>Digital Marketing</a:t>
             </a:r>
           </a:p>
           <a:p>
             <a:r>
-              <a:rPr sz="1400" b="0">
+              <a:rPr sz="1500" b="0">
                 <a:solidFill>
                   <a:srgbClr val="000000"/>
                 </a:solidFill>
-                <a:latin typeface="Arial"/>
+                <a:latin typeface="Calibri"/>
               </a:rPr>
               <a:t>Score 33  ·  28%</a:t>
             </a:r>
@@ -5931,22 +5931,22 @@
           <a:lstStyle/>
           <a:p>
             <a:r>
-              <a:rPr sz="1500" b="1">
+              <a:rPr sz="1600" b="1">
                 <a:solidFill>
                   <a:srgbClr val="000000"/>
                 </a:solidFill>
-                <a:latin typeface="Arial"/>
+                <a:latin typeface="Calibri"/>
               </a:rPr>
               <a:t>Data Analytics</a:t>
             </a:r>
           </a:p>
           <a:p>
             <a:r>
-              <a:rPr sz="1400" b="0">
+              <a:rPr sz="1500" b="0">
                 <a:solidFill>
                   <a:srgbClr val="000000"/>
                 </a:solidFill>
-                <a:latin typeface="Arial"/>
+                <a:latin typeface="Calibri"/>
               </a:rPr>
               <a:t>Score 18  ·  15%</a:t>
             </a:r>
@@ -6021,22 +6021,22 @@
           <a:lstStyle/>
           <a:p>
             <a:r>
-              <a:rPr sz="1500" b="1">
+              <a:rPr sz="1600" b="1">
                 <a:solidFill>
                   <a:srgbClr val="000000"/>
                 </a:solidFill>
-                <a:latin typeface="Arial"/>
+                <a:latin typeface="Calibri"/>
               </a:rPr>
               <a:t>Generative AI &amp; Prompt Engineering</a:t>
             </a:r>
           </a:p>
           <a:p>
             <a:r>
-              <a:rPr sz="1400" b="0">
+              <a:rPr sz="1500" b="0">
                 <a:solidFill>
                   <a:srgbClr val="000000"/>
                 </a:solidFill>
-                <a:latin typeface="Arial"/>
+                <a:latin typeface="Calibri"/>
               </a:rPr>
               <a:t>Score 13  ·  11%</a:t>
             </a:r>
@@ -6111,22 +6111,22 @@
           <a:lstStyle/>
           <a:p>
             <a:r>
-              <a:rPr sz="1500" b="1">
+              <a:rPr sz="1600" b="1">
                 <a:solidFill>
                   <a:srgbClr val="000000"/>
                 </a:solidFill>
-                <a:latin typeface="Arial"/>
+                <a:latin typeface="Calibri"/>
               </a:rPr>
               <a:t>Web Development</a:t>
             </a:r>
           </a:p>
           <a:p>
             <a:r>
-              <a:rPr sz="1400" b="0">
+              <a:rPr sz="1500" b="0">
                 <a:solidFill>
                   <a:srgbClr val="000000"/>
                 </a:solidFill>
-                <a:latin typeface="Arial"/>
+                <a:latin typeface="Calibri"/>
               </a:rPr>
               <a:t>Score 13  ·  11%</a:t>
             </a:r>
@@ -6161,7 +6161,7 @@
                 <a:solidFill>
                   <a:srgbClr val="404040"/>
                 </a:solidFill>
-                <a:latin typeface="Arial"/>
+                <a:latin typeface="Calibri"/>
               </a:rPr>
               <a:t>Source: Google Trends, Nigeria, past 12 months (28 September 2025 to 28 September 2026).</a:t>
             </a:r>
@@ -6254,13 +6254,13 @@
           <a:p>
             <a:pPr algn="ctr"/>
             <a:r>
-              <a:rPr sz="4000" b="0">
+              <a:rPr sz="3600" b="1">
                 <a:solidFill>
                   <a:srgbClr val="1F3864"/>
                 </a:solidFill>
-                <a:latin typeface="Rockwell Condensed"/>
+                <a:latin typeface="Cambria"/>
               </a:rPr>
-              <a:t>OBSERVATIONS</a:t>
+              <a:t>Observations</a:t>
             </a:r>
           </a:p>
         </p:txBody>
@@ -6325,7 +6325,7 @@
           </a:xfrm>
         </p:spPr>
         <p:txBody>
-          <a:bodyPr/>
+          <a:bodyPr anchor="ctr"/>
           <a:lstStyle/>
           <a:p>
             <a:pPr>
@@ -6334,20 +6334,20 @@
               </a:spcAft>
             </a:pPr>
             <a:r>
-              <a:rPr sz="2200" b="1">
+              <a:rPr sz="2400" b="1">
                 <a:solidFill>
                   <a:srgbClr val="1F3864"/>
                 </a:solidFill>
-                <a:latin typeface="Arial"/>
+                <a:latin typeface="Calibri"/>
               </a:rPr>
               <a:t>Cybersecurity</a:t>
             </a:r>
             <a:r>
-              <a:rPr sz="2200" b="0">
+              <a:rPr sz="2400" b="0">
                 <a:solidFill>
                   <a:srgbClr val="000000"/>
                 </a:solidFill>
-                <a:latin typeface="Arial"/>
+                <a:latin typeface="Calibri"/>
               </a:rPr>
               <a:t> had the highest interest, with 36% of the total.</a:t>
             </a:r>
@@ -6359,20 +6359,20 @@
               </a:spcAft>
             </a:pPr>
             <a:r>
-              <a:rPr sz="2200" b="1">
+              <a:rPr sz="2400" b="1">
                 <a:solidFill>
                   <a:srgbClr val="1F3864"/>
                 </a:solidFill>
-                <a:latin typeface="Arial"/>
+                <a:latin typeface="Calibri"/>
               </a:rPr>
               <a:t>Digital Marketing</a:t>
             </a:r>
             <a:r>
-              <a:rPr sz="2200" b="0">
+              <a:rPr sz="2400" b="0">
                 <a:solidFill>
                   <a:srgbClr val="000000"/>
                 </a:solidFill>
-                <a:latin typeface="Arial"/>
+                <a:latin typeface="Calibri"/>
               </a:rPr>
               <a:t> came second with 28%.</a:t>
             </a:r>
@@ -6384,20 +6384,20 @@
               </a:spcAft>
             </a:pPr>
             <a:r>
-              <a:rPr sz="2200" b="1">
+              <a:rPr sz="2400" b="1">
                 <a:solidFill>
                   <a:srgbClr val="1F3864"/>
                 </a:solidFill>
-                <a:latin typeface="Arial"/>
+                <a:latin typeface="Calibri"/>
               </a:rPr>
               <a:t>Data Analytics</a:t>
             </a:r>
             <a:r>
-              <a:rPr sz="2200" b="0">
+              <a:rPr sz="2400" b="0">
                 <a:solidFill>
                   <a:srgbClr val="000000"/>
                 </a:solidFill>
-                <a:latin typeface="Arial"/>
+                <a:latin typeface="Calibri"/>
               </a:rPr>
               <a:t> came third with 15%.</a:t>
             </a:r>
@@ -6409,38 +6409,38 @@
               </a:spcAft>
             </a:pPr>
             <a:r>
-              <a:rPr sz="2200" b="1">
+              <a:rPr sz="2400" b="1">
                 <a:solidFill>
                   <a:srgbClr val="1F3864"/>
                 </a:solidFill>
-                <a:latin typeface="Arial"/>
+                <a:latin typeface="Calibri"/>
               </a:rPr>
               <a:t>Generative AI &amp; Prompt Engineering</a:t>
             </a:r>
             <a:r>
-              <a:rPr sz="2200" b="0">
+              <a:rPr sz="2400" b="0">
                 <a:solidFill>
                   <a:srgbClr val="000000"/>
                 </a:solidFill>
-                <a:latin typeface="Arial"/>
+                <a:latin typeface="Calibri"/>
               </a:rPr>
               <a:t> and </a:t>
             </a:r>
             <a:r>
-              <a:rPr sz="2200" b="1">
+              <a:rPr sz="2400" b="1">
                 <a:solidFill>
                   <a:srgbClr val="1F3864"/>
                 </a:solidFill>
-                <a:latin typeface="Arial"/>
+                <a:latin typeface="Calibri"/>
               </a:rPr>
               <a:t>Web Development</a:t>
             </a:r>
             <a:r>
-              <a:rPr sz="2200" b="0">
+              <a:rPr sz="2400" b="0">
                 <a:solidFill>
                   <a:srgbClr val="000000"/>
                 </a:solidFill>
-                <a:latin typeface="Arial"/>
+                <a:latin typeface="Calibri"/>
               </a:rPr>
               <a:t> had the lowest interest, with 11% each.</a:t>
             </a:r>
@@ -6452,11 +6452,11 @@
               </a:spcAft>
             </a:pPr>
             <a:r>
-              <a:rPr sz="2200" b="0">
+              <a:rPr sz="2400" b="0">
                 <a:solidFill>
                   <a:srgbClr val="000000"/>
                 </a:solidFill>
-                <a:latin typeface="Arial"/>
+                <a:latin typeface="Calibri"/>
               </a:rPr>
               <a:t>This means Cybersecurity and Digital Marketing should be promoted first.</a:t>
             </a:r>
@@ -6526,7 +6526,7 @@
                 <a:solidFill>
                   <a:srgbClr val="404040"/>
                 </a:solidFill>
-                <a:latin typeface="Arial"/>
+                <a:latin typeface="Calibri"/>
               </a:rPr>
               <a:t>What the pie chart shows</a:t>
             </a:r>
@@ -6681,11 +6681,11 @@
           <a:p>
             <a:pPr algn="ctr"/>
             <a:r>
-              <a:rPr sz="5000" b="0">
+              <a:rPr sz="4800" b="1">
                 <a:solidFill>
                   <a:srgbClr val="1F3864"/>
                 </a:solidFill>
-                <a:latin typeface="Rockwell Condensed"/>
+                <a:latin typeface="Cambria"/>
               </a:rPr>
               <a:t>THANK YOU</a:t>
             </a:r>
@@ -6722,7 +6722,7 @@
                 <a:solidFill>
                   <a:srgbClr val="000000"/>
                 </a:solidFill>
-                <a:latin typeface="Arial"/>
+                <a:latin typeface="Calibri"/>
               </a:rPr>
               <a:t>Any questions?</a:t>
             </a:r>
@@ -6738,7 +6738,7 @@
                 <a:solidFill>
                   <a:srgbClr val="000000"/>
                 </a:solidFill>
-                <a:latin typeface="Arial"/>
+                <a:latin typeface="Calibri"/>
               </a:rPr>
               <a:t>Market Research Lab, Task 1</a:t>
             </a:r>
@@ -6934,12 +6934,12 @@
     </a:clrScheme>
     <a:fontScheme name="Office">
       <a:majorFont>
-        <a:latin typeface="Rockwell Condensed"/>
+        <a:latin typeface="Cambria"/>
         <a:ea typeface=""/>
         <a:cs typeface=""/>
       </a:majorFont>
       <a:minorFont>
-        <a:latin typeface="Arial"/>
+        <a:latin typeface="Calibri"/>
         <a:ea typeface=""/>
         <a:cs typeface=""/>
       </a:minorFont>
@@ -7135,12 +7135,12 @@
     </a:clrScheme>
     <a:fontScheme name="Office">
       <a:majorFont>
-        <a:latin typeface="Rockwell Condensed"/>
+        <a:latin typeface="Cambria"/>
         <a:ea typeface=""/>
         <a:cs typeface=""/>
       </a:majorFont>
       <a:minorFont>
-        <a:latin typeface="Arial"/>
+        <a:latin typeface="Calibri"/>
         <a:ea typeface=""/>
         <a:cs typeface=""/>
       </a:minorFont>
